--- a/plans/pitch/product-output/myscoutee_product_pitch.pptx
+++ b/plans/pitch/product-output/myscoutee_product_pitch.pptx
@@ -70,7 +70,7 @@
         <p:txBody>
           <a:bodyPr/>
           <a:p>
-            <a:fld id="{9F38D504-1468-4484-8916-28D496786599}" type="slidenum">
+            <a:fld id="{D52A231C-5E69-4486-B9E5-A6D6CD15BB77}" type="slidenum">
               <a:t>&lt;#&gt;</a:t>
             </a:fld>
           </a:p>
@@ -258,7 +258,7 @@
         <p:txBody>
           <a:bodyPr/>
           <a:p>
-            <a:fld id="{199430FE-7C9D-4B22-80C0-1FB0AF09A321}" type="slidenum">
+            <a:fld id="{2168CD24-7949-4484-A3C2-21230F8B65D3}" type="slidenum">
               <a:t>&lt;#&gt;</a:t>
             </a:fld>
           </a:p>
@@ -514,7 +514,7 @@
         <p:txBody>
           <a:bodyPr/>
           <a:p>
-            <a:fld id="{48C656D1-0FFA-42F0-9D56-F5749E6E6DBD}" type="slidenum">
+            <a:fld id="{0D811EA9-A25C-4CF7-80F0-FFC0A1552805}" type="slidenum">
               <a:t>&lt;#&gt;</a:t>
             </a:fld>
           </a:p>
@@ -838,7 +838,7 @@
         <p:txBody>
           <a:bodyPr/>
           <a:p>
-            <a:fld id="{8A030053-3201-4DBE-AE67-AB95E862892F}" type="slidenum">
+            <a:fld id="{37DB6668-4948-4CF6-A666-40F0B7E073B3}" type="slidenum">
               <a:t>&lt;#&gt;</a:t>
             </a:fld>
           </a:p>
@@ -995,7 +995,7 @@
         <p:txBody>
           <a:bodyPr/>
           <a:p>
-            <a:fld id="{73C0E8AE-C898-4B02-AABD-B882D3F324A6}" type="slidenum">
+            <a:fld id="{1533DD20-8DDD-457E-9862-4B23F71A0BC9}" type="slidenum">
               <a:t>&lt;#&gt;</a:t>
             </a:fld>
           </a:p>
@@ -1149,7 +1149,7 @@
         <p:txBody>
           <a:bodyPr/>
           <a:p>
-            <a:fld id="{F5111334-2522-413D-8A81-CDD49E200192}" type="slidenum">
+            <a:fld id="{3F724756-D189-40EE-83F8-63E238D2D3F5}" type="slidenum">
               <a:t>&lt;#&gt;</a:t>
             </a:fld>
           </a:p>
@@ -1337,7 +1337,7 @@
         <p:txBody>
           <a:bodyPr/>
           <a:p>
-            <a:fld id="{3AE30500-4AAA-4814-AD61-1DD7CFFA4CBC}" type="slidenum">
+            <a:fld id="{8DD56888-0F2A-46C3-9368-F1776353C465}" type="slidenum">
               <a:t>&lt;#&gt;</a:t>
             </a:fld>
           </a:p>
@@ -1457,7 +1457,7 @@
         <p:txBody>
           <a:bodyPr/>
           <a:p>
-            <a:fld id="{E7042C92-71D0-48FA-A39B-EA076D7133B1}" type="slidenum">
+            <a:fld id="{1FE41D3E-0E89-4272-8093-E49A72B9B415}" type="slidenum">
               <a:t>&lt;#&gt;</a:t>
             </a:fld>
           </a:p>
@@ -1577,7 +1577,7 @@
         <p:txBody>
           <a:bodyPr/>
           <a:p>
-            <a:fld id="{FF57B61A-C27A-4145-A69D-361E24711352}" type="slidenum">
+            <a:fld id="{AA1F0A41-08DB-4018-B3E6-B2DAA73BDC32}" type="slidenum">
               <a:t>&lt;#&gt;</a:t>
             </a:fld>
           </a:p>
@@ -1799,7 +1799,7 @@
         <p:txBody>
           <a:bodyPr/>
           <a:p>
-            <a:fld id="{B325E9E6-0998-4101-AD3E-1EE4D1CA5B86}" type="slidenum">
+            <a:fld id="{8798779E-0BA8-4016-A27C-5F6F6088EF6C}" type="slidenum">
               <a:t>&lt;#&gt;</a:t>
             </a:fld>
           </a:p>
@@ -2021,7 +2021,7 @@
         <p:txBody>
           <a:bodyPr/>
           <a:p>
-            <a:fld id="{C9DF6F4A-C2BA-41FB-86D2-17711FCEBE9B}" type="slidenum">
+            <a:fld id="{9036E161-F2D2-4738-B137-C7022EB04388}" type="slidenum">
               <a:t>&lt;#&gt;</a:t>
             </a:fld>
           </a:p>
@@ -2243,7 +2243,7 @@
         <p:txBody>
           <a:bodyPr/>
           <a:p>
-            <a:fld id="{310379AD-4FCD-4887-9FAD-270EC89E55D4}" type="slidenum">
+            <a:fld id="{084D4115-6992-44C1-80A8-7878680902C4}" type="slidenum">
               <a:t>&lt;#&gt;</a:t>
             </a:fld>
           </a:p>
@@ -2655,7 +2655,7 @@
             <a:pPr algn="r">
               <a:buNone/>
             </a:pPr>
-            <a:fld id="{A2526AC5-87EF-4C83-8C53-D198C666812C}" type="slidenum">
+            <a:fld id="{B2FF3EE8-5C57-4F3B-B76E-6A02BA337CFB}" type="slidenum">
               <a:rPr b="0" lang="en-US" sz="1400" spc="-1" strike="noStrike">
                 <a:latin typeface="Times New Roman"/>
               </a:rPr>

--- a/plans/pitch/product-output/myscoutee_product_pitch.pptx
+++ b/plans/pitch/product-output/myscoutee_product_pitch.pptx
@@ -70,7 +70,7 @@
         <p:txBody>
           <a:bodyPr/>
           <a:p>
-            <a:fld id="{D52A231C-5E69-4486-B9E5-A6D6CD15BB77}" type="slidenum">
+            <a:fld id="{4DED0A6C-C553-4F2E-BADA-27161FD98438}" type="slidenum">
               <a:t>&lt;#&gt;</a:t>
             </a:fld>
           </a:p>
@@ -258,7 +258,7 @@
         <p:txBody>
           <a:bodyPr/>
           <a:p>
-            <a:fld id="{2168CD24-7949-4484-A3C2-21230F8B65D3}" type="slidenum">
+            <a:fld id="{9B423855-CFFE-4E56-9266-78984C583BD3}" type="slidenum">
               <a:t>&lt;#&gt;</a:t>
             </a:fld>
           </a:p>
@@ -514,7 +514,7 @@
         <p:txBody>
           <a:bodyPr/>
           <a:p>
-            <a:fld id="{0D811EA9-A25C-4CF7-80F0-FFC0A1552805}" type="slidenum">
+            <a:fld id="{46F3798C-D816-4E09-A378-89EEF831D707}" type="slidenum">
               <a:t>&lt;#&gt;</a:t>
             </a:fld>
           </a:p>
@@ -838,7 +838,7 @@
         <p:txBody>
           <a:bodyPr/>
           <a:p>
-            <a:fld id="{37DB6668-4948-4CF6-A666-40F0B7E073B3}" type="slidenum">
+            <a:fld id="{0713E5D3-AB57-49DC-9F9C-64D7E184FAA0}" type="slidenum">
               <a:t>&lt;#&gt;</a:t>
             </a:fld>
           </a:p>
@@ -995,7 +995,7 @@
         <p:txBody>
           <a:bodyPr/>
           <a:p>
-            <a:fld id="{1533DD20-8DDD-457E-9862-4B23F71A0BC9}" type="slidenum">
+            <a:fld id="{D5F8C4D7-7A2A-446D-B5AA-A6E9F580C20B}" type="slidenum">
               <a:t>&lt;#&gt;</a:t>
             </a:fld>
           </a:p>
@@ -1149,7 +1149,7 @@
         <p:txBody>
           <a:bodyPr/>
           <a:p>
-            <a:fld id="{3F724756-D189-40EE-83F8-63E238D2D3F5}" type="slidenum">
+            <a:fld id="{3792CEA0-0826-48C4-8758-587DE109BEF6}" type="slidenum">
               <a:t>&lt;#&gt;</a:t>
             </a:fld>
           </a:p>
@@ -1337,7 +1337,7 @@
         <p:txBody>
           <a:bodyPr/>
           <a:p>
-            <a:fld id="{8DD56888-0F2A-46C3-9368-F1776353C465}" type="slidenum">
+            <a:fld id="{F76B6B9D-AF61-481D-A2C2-D0F63B702E55}" type="slidenum">
               <a:t>&lt;#&gt;</a:t>
             </a:fld>
           </a:p>
@@ -1457,7 +1457,7 @@
         <p:txBody>
           <a:bodyPr/>
           <a:p>
-            <a:fld id="{1FE41D3E-0E89-4272-8093-E49A72B9B415}" type="slidenum">
+            <a:fld id="{6473BFFD-5157-4726-8681-B87A74460021}" type="slidenum">
               <a:t>&lt;#&gt;</a:t>
             </a:fld>
           </a:p>
@@ -1577,7 +1577,7 @@
         <p:txBody>
           <a:bodyPr/>
           <a:p>
-            <a:fld id="{AA1F0A41-08DB-4018-B3E6-B2DAA73BDC32}" type="slidenum">
+            <a:fld id="{CCFD4963-4A17-43AD-89F0-FDAAD94FFD1A}" type="slidenum">
               <a:t>&lt;#&gt;</a:t>
             </a:fld>
           </a:p>
@@ -1799,7 +1799,7 @@
         <p:txBody>
           <a:bodyPr/>
           <a:p>
-            <a:fld id="{8798779E-0BA8-4016-A27C-5F6F6088EF6C}" type="slidenum">
+            <a:fld id="{A2E5E962-FC42-47F7-9C9E-54258C51FD91}" type="slidenum">
               <a:t>&lt;#&gt;</a:t>
             </a:fld>
           </a:p>
@@ -2021,7 +2021,7 @@
         <p:txBody>
           <a:bodyPr/>
           <a:p>
-            <a:fld id="{9036E161-F2D2-4738-B137-C7022EB04388}" type="slidenum">
+            <a:fld id="{E7336835-6790-4EC1-98FA-CB86714B1A26}" type="slidenum">
               <a:t>&lt;#&gt;</a:t>
             </a:fld>
           </a:p>
@@ -2243,7 +2243,7 @@
         <p:txBody>
           <a:bodyPr/>
           <a:p>
-            <a:fld id="{084D4115-6992-44C1-80A8-7878680902C4}" type="slidenum">
+            <a:fld id="{931D40FA-E948-4C05-AF5D-2E7E9219BE48}" type="slidenum">
               <a:t>&lt;#&gt;</a:t>
             </a:fld>
           </a:p>
@@ -2655,7 +2655,7 @@
             <a:pPr algn="r">
               <a:buNone/>
             </a:pPr>
-            <a:fld id="{B2FF3EE8-5C57-4F3B-B76E-6A02BA337CFB}" type="slidenum">
+            <a:fld id="{F5023AB7-C949-44AF-BE46-6E073731055D}" type="slidenum">
               <a:rPr b="0" lang="en-US" sz="1400" spc="-1" strike="noStrike">
                 <a:latin typeface="Times New Roman"/>
               </a:rPr>

--- a/plans/pitch/product-output/myscoutee_product_pitch.pptx
+++ b/plans/pitch/product-output/myscoutee_product_pitch.pptx
@@ -70,7 +70,7 @@
         <p:txBody>
           <a:bodyPr/>
           <a:p>
-            <a:fld id="{4DED0A6C-C553-4F2E-BADA-27161FD98438}" type="slidenum">
+            <a:fld id="{3A5FBEB0-897A-4BA3-BB39-69CF26CD31AC}" type="slidenum">
               <a:t>&lt;#&gt;</a:t>
             </a:fld>
           </a:p>
@@ -258,7 +258,7 @@
         <p:txBody>
           <a:bodyPr/>
           <a:p>
-            <a:fld id="{9B423855-CFFE-4E56-9266-78984C583BD3}" type="slidenum">
+            <a:fld id="{EB96885B-8796-443D-BB00-1FDBCEAD1381}" type="slidenum">
               <a:t>&lt;#&gt;</a:t>
             </a:fld>
           </a:p>
@@ -514,7 +514,7 @@
         <p:txBody>
           <a:bodyPr/>
           <a:p>
-            <a:fld id="{46F3798C-D816-4E09-A378-89EEF831D707}" type="slidenum">
+            <a:fld id="{508DDD43-BA1A-468D-9E64-E398FD06AD44}" type="slidenum">
               <a:t>&lt;#&gt;</a:t>
             </a:fld>
           </a:p>
@@ -838,7 +838,7 @@
         <p:txBody>
           <a:bodyPr/>
           <a:p>
-            <a:fld id="{0713E5D3-AB57-49DC-9F9C-64D7E184FAA0}" type="slidenum">
+            <a:fld id="{BA03F332-EF7E-497B-A50C-ED38291AC126}" type="slidenum">
               <a:t>&lt;#&gt;</a:t>
             </a:fld>
           </a:p>
@@ -995,7 +995,7 @@
         <p:txBody>
           <a:bodyPr/>
           <a:p>
-            <a:fld id="{D5F8C4D7-7A2A-446D-B5AA-A6E9F580C20B}" type="slidenum">
+            <a:fld id="{82872B9F-6939-4DB5-9DF5-1223C7F51066}" type="slidenum">
               <a:t>&lt;#&gt;</a:t>
             </a:fld>
           </a:p>
@@ -1149,7 +1149,7 @@
         <p:txBody>
           <a:bodyPr/>
           <a:p>
-            <a:fld id="{3792CEA0-0826-48C4-8758-587DE109BEF6}" type="slidenum">
+            <a:fld id="{FC4EE80E-35C1-46C0-8B68-8FE7650EEB8B}" type="slidenum">
               <a:t>&lt;#&gt;</a:t>
             </a:fld>
           </a:p>
@@ -1337,7 +1337,7 @@
         <p:txBody>
           <a:bodyPr/>
           <a:p>
-            <a:fld id="{F76B6B9D-AF61-481D-A2C2-D0F63B702E55}" type="slidenum">
+            <a:fld id="{C7B8586F-A8D9-4616-96FF-60ECC5FD1FC8}" type="slidenum">
               <a:t>&lt;#&gt;</a:t>
             </a:fld>
           </a:p>
@@ -1457,7 +1457,7 @@
         <p:txBody>
           <a:bodyPr/>
           <a:p>
-            <a:fld id="{6473BFFD-5157-4726-8681-B87A74460021}" type="slidenum">
+            <a:fld id="{E28BE699-75E2-4EAA-BFCF-C2FE2CD6C51E}" type="slidenum">
               <a:t>&lt;#&gt;</a:t>
             </a:fld>
           </a:p>
@@ -1577,7 +1577,7 @@
         <p:txBody>
           <a:bodyPr/>
           <a:p>
-            <a:fld id="{CCFD4963-4A17-43AD-89F0-FDAAD94FFD1A}" type="slidenum">
+            <a:fld id="{EB3E8643-ACE9-4AF9-AC51-C21B6959893E}" type="slidenum">
               <a:t>&lt;#&gt;</a:t>
             </a:fld>
           </a:p>
@@ -1799,7 +1799,7 @@
         <p:txBody>
           <a:bodyPr/>
           <a:p>
-            <a:fld id="{A2E5E962-FC42-47F7-9C9E-54258C51FD91}" type="slidenum">
+            <a:fld id="{574DC14E-A1BC-42DB-BB46-E097E29EB7F1}" type="slidenum">
               <a:t>&lt;#&gt;</a:t>
             </a:fld>
           </a:p>
@@ -2021,7 +2021,7 @@
         <p:txBody>
           <a:bodyPr/>
           <a:p>
-            <a:fld id="{E7336835-6790-4EC1-98FA-CB86714B1A26}" type="slidenum">
+            <a:fld id="{6C9F1183-07A1-4E2B-9575-5093B52FB798}" type="slidenum">
               <a:t>&lt;#&gt;</a:t>
             </a:fld>
           </a:p>
@@ -2243,7 +2243,7 @@
         <p:txBody>
           <a:bodyPr/>
           <a:p>
-            <a:fld id="{931D40FA-E948-4C05-AF5D-2E7E9219BE48}" type="slidenum">
+            <a:fld id="{67186CDA-23BF-4970-9210-CE632C0F33D3}" type="slidenum">
               <a:t>&lt;#&gt;</a:t>
             </a:fld>
           </a:p>
@@ -2655,7 +2655,7 @@
             <a:pPr algn="r">
               <a:buNone/>
             </a:pPr>
-            <a:fld id="{F5023AB7-C949-44AF-BE46-6E073731055D}" type="slidenum">
+            <a:fld id="{06188AC5-8C13-4125-AD3C-6D7B39B6B09D}" type="slidenum">
               <a:rPr b="0" lang="en-US" sz="1400" spc="-1" strike="noStrike">
                 <a:latin typeface="Times New Roman"/>
               </a:rPr>
